--- a/dist/초1/기술·가정/생활자립/초1_기술·가정_생활자립_01_내물건정리와집안일.pptx
+++ b/dist/초1/기술·가정/생활자립/초1_기술·가정_생활자립_01_내물건정리와집안일.pptx
@@ -114,34 +114,34 @@
   <p:extLst>
     <p:ext uri="{521415D9-36F7-43E2-AB2F-B90AF26B5E84}">
       <p14:sectionLst xmlns:p14="http://schemas.microsoft.com/office/powerpoint/2010/main">
-        <p14:section name="도입" id="{2d0b92c3-29b1-f395-46c3-566965245077}">
+        <p14:section name="도입" id="{971d6ffb-3f41-30aa-f2b7-57a160affb8a}">
           <p14:sldIdLst>
             <p14:sldId id="256"/>
             <p14:sldId id="257"/>
           </p14:sldIdLst>
         </p14:section>
-        <p14:section name="개념" id="{9771a045-9b7b-dd03-3433-a331bd72c47c}">
+        <p14:section name="개념" id="{f6be4ec4-111f-fa35-5973-d16d77e3a5bf}">
           <p14:sldIdLst>
             <p14:sldId id="258"/>
           </p14:sldIdLst>
         </p14:section>
-        <p14:section name="연습" id="{2afa4c23-5687-2f26-ed23-d5f4f2ab16e8}">
+        <p14:section name="연습" id="{b94ac51c-e02a-6f5d-476a-48d76db5a1e1}">
           <p14:sldIdLst>
             <p14:sldId id="259"/>
             <p14:sldId id="260"/>
           </p14:sldIdLst>
         </p14:section>
-        <p14:section name="확인" id="{36b138b4-6e35-f661-735f-428493f5d5fc}">
+        <p14:section name="확인" id="{feba831c-92bf-d711-c5b6-b8d96e0ead7c}">
           <p14:sldIdLst>
             <p14:sldId id="261"/>
           </p14:sldIdLst>
         </p14:section>
-        <p14:section name="정리" id="{e86fb9dc-e4cc-d531-9ffc-d192b28a9a77}">
+        <p14:section name="정리" id="{cff9500a-faa9-0a33-2305-c233f584de85}">
           <p14:sldIdLst>
             <p14:sldId id="262"/>
           </p14:sldIdLst>
         </p14:section>
-        <p14:section name="보충" id="{5a9889bf-4b2c-f1b8-2a69-87de249fe5b0}">
+        <p14:section name="보충" id="{152f3572-df98-749e-2322-402cc01176ce}">
           <p14:sldIdLst>
             <p14:sldId id="263"/>
           </p14:sldIdLst>
